--- a/slides_zh.pptx
+++ b/slides_zh.pptx
@@ -24891,7 +24891,7 @@
           </a:bodyPr>
           <a:p>
             <a:r>
-              <a:rPr lang="en-US" sz="2400" b="0" u="none" strike="noStrike">
+              <a:rPr lang="en-US" sz="2150" b="0" u="none" strike="noStrike">
                 <a:solidFill>
                   <a:srgbClr val="FFFFFF"/>
                 </a:solidFill>
@@ -24961,7 +24961,7 @@
           </a:bodyPr>
           <a:p>
             <a:r>
-              <a:rPr lang="en-US" sz="2400" b="0" u="none" strike="noStrike">
+              <a:rPr lang="en-US" sz="2150" b="0" u="none" strike="noStrike">
                 <a:solidFill>
                   <a:srgbClr val="FFFFFF"/>
                 </a:solidFill>
@@ -25647,7 +25647,7 @@
               </a:lnSpc>
             </a:pPr>
             <a:r>
-              <a:rPr lang="en-US" sz="2000" b="0" u="none" strike="noStrike">
+              <a:rPr lang="en-US" sz="1950" b="0" u="none" strike="noStrike">
                 <a:solidFill>
                   <a:srgbClr val="FFFFFF"/>
                 </a:solidFill>
@@ -25874,7 +25874,7 @@
               </a:lnSpc>
             </a:pPr>
             <a:r>
-              <a:rPr lang="en-US" sz="2000" b="0" u="none" strike="noStrike">
+              <a:rPr lang="en-US" sz="1950" b="0" u="none" strike="noStrike">
                 <a:solidFill>
                   <a:srgbClr val="FFFFFF"/>
                 </a:solidFill>
@@ -31764,7 +31764,7 @@
               </a:lnSpc>
             </a:pPr>
             <a:r>
-              <a:rPr lang="en-US" sz="5400" b="1" u="none" strike="noStrike">
+              <a:rPr lang="en-US" sz="5050" b="1" u="none" strike="noStrike">
                 <a:solidFill>
                   <a:srgbClr val="00FF41"/>
                 </a:solidFill>
@@ -42602,7 +42602,7 @@
               </a:lnSpc>
             </a:pPr>
             <a:r>
-              <a:rPr lang="en-US" sz="2600" b="1" u="none" strike="noStrike">
+              <a:rPr lang="en-US" sz="2550" b="1" u="none" strike="noStrike">
                 <a:solidFill>
                   <a:srgbClr val="FFFFFF"/>
                 </a:solidFill>
@@ -43778,7 +43778,7 @@
               </a:lnSpc>
             </a:pPr>
             <a:r>
-              <a:rPr lang="en-US" sz="2800" b="1" u="none" strike="noStrike">
+              <a:rPr lang="en-US" sz="2300" b="1" u="none" strike="noStrike">
                 <a:solidFill>
                   <a:srgbClr val="CCCCD6"/>
                 </a:solidFill>
@@ -46338,7 +46338,7 @@
               </a:lnSpc>
             </a:pPr>
             <a:r>
-              <a:rPr lang="en-US" sz="2600" b="1" u="none" strike="noStrike">
+              <a:rPr lang="en-US" sz="2550" b="1" u="none" strike="noStrike">
                 <a:solidFill>
                   <a:srgbClr val="00D4FF"/>
                 </a:solidFill>
@@ -46349,7 +46349,7 @@
               <a:t>▶ </a:t>
             </a:r>
             <a:r>
-              <a:rPr lang="en-US" sz="2600" b="0" u="none" strike="noStrike">
+              <a:rPr lang="en-US" sz="2550" b="0" u="none" strike="noStrike">
                 <a:solidFill>
                   <a:srgbClr val="FFFFFF"/>
                 </a:solidFill>
@@ -46375,7 +46375,7 @@
               </a:lnSpc>
             </a:pPr>
             <a:r>
-              <a:rPr lang="en-US" sz="2600" b="1" u="none" strike="noStrike">
+              <a:rPr lang="en-US" sz="2550" b="1" u="none" strike="noStrike">
                 <a:solidFill>
                   <a:srgbClr val="00D4FF"/>
                 </a:solidFill>
@@ -46386,7 +46386,7 @@
               <a:t>▶ </a:t>
             </a:r>
             <a:r>
-              <a:rPr lang="en-US" sz="2600" b="0" u="none" strike="noStrike">
+              <a:rPr lang="en-US" sz="2550" b="0" u="none" strike="noStrike">
                 <a:solidFill>
                   <a:srgbClr val="FFFFFF"/>
                 </a:solidFill>
@@ -46412,7 +46412,7 @@
               </a:lnSpc>
             </a:pPr>
             <a:r>
-              <a:rPr lang="en-US" sz="2600" b="1" u="none" strike="noStrike">
+              <a:rPr lang="en-US" sz="2550" b="1" u="none" strike="noStrike">
                 <a:solidFill>
                   <a:srgbClr val="00D4FF"/>
                 </a:solidFill>
@@ -46423,7 +46423,7 @@
               <a:t>▶ </a:t>
             </a:r>
             <a:r>
-              <a:rPr lang="en-US" sz="2600" b="0" u="none" strike="noStrike">
+              <a:rPr lang="en-US" sz="2550" b="0" u="none" strike="noStrike">
                 <a:solidFill>
                   <a:srgbClr val="FFFFFF"/>
                 </a:solidFill>
